--- a/data/research/1_gain_ep/汇报PPT/20261016/20261016.pptx
+++ b/data/research/1_gain_ep/汇报PPT/20261016/20261016.pptx
@@ -12,6 +12,7 @@
     <p:sldId id="260" r:id="rId10"/>
     <p:sldId id="261" r:id="rId11"/>
     <p:sldId id="262" r:id="rId12"/>
+    <p:sldId id="263" r:id="rId13"/>
   </p:sldIdLst>
   <p:sldSz cx="12192000" cy="6858000"/>
   <p:notesSz cx="6858000" cy="9144000"/>
@@ -3507,18 +3508,30 @@
         </p:nvSpPr>
         <p:spPr>
           <a:xfrm>
-            <a:off x="548640" y="365760"/>
-          </a:xfrm>
-        </p:spPr>
-        <p:txBody>
-          <a:bodyPr/>
+            <a:off x="549275" y="401320"/>
+            <a:ext cx="5500000" cy="398780"/>
+          </a:xfrm>
+          <a:prstGeom prst="rect">
+            <a:avLst/>
+          </a:prstGeom>
+          <a:noFill/>
+          <a:ln>
+            <a:solidFill>
+              <a:schemeClr val="tx1"/>
+            </a:solidFill>
+          </a:ln>
+        </p:spPr>
+        <p:txBody>
+          <a:bodyPr wrap="square" rtlCol="0">
+            <a:spAutoFit/>
+          </a:bodyPr>
           <a:lstStyle/>
           <a:p>
             <a:r>
-              <a:rPr>
-                <a:latin typeface="等线 Light"/>
-                <a:ea typeface="等线 Light"/>
-                <a:cs typeface="等线 Light"/>
+              <a:rPr sz="2000" spc="300">
+                <a:latin typeface="Heiti SC Light" charset="-122"/>
+                <a:ea typeface="Heiti SC Light" charset="-122"/>
+                <a:cs typeface="Heiti SC Light" charset="-122"/>
               </a:rPr>
               <a:t>AI COMSOL</a:t>
             </a:r>
@@ -3850,14 +3863,14 @@
       </p:sp>
       <p:sp>
         <p:nvSpPr>
-          <p:cNvPr id="2" name="文本框 1"/>
+          <p:cNvPr id="2" name="标题 1"/>
           <p:cNvSpPr txBox="1"/>
           <p:nvPr/>
         </p:nvSpPr>
         <p:spPr>
           <a:xfrm>
             <a:off x="549275" y="401320"/>
-            <a:ext cx="1273810" cy="398780"/>
+            <a:ext cx="5500000" cy="398780"/>
           </a:xfrm>
           <a:prstGeom prst="rect">
             <a:avLst/>
@@ -3881,15 +3894,7 @@
                 <a:ea typeface="Heiti SC Light" charset="-122"/>
                 <a:cs typeface="Heiti SC Light" charset="-122"/>
               </a:rPr>
-              <a:t>·</a:t>
-            </a:r>
-            <a:r>
-              <a:rPr kumimoji="1" lang="en-US" altLang="zh-CN" sz="2000" spc="300" dirty="0">
-                <a:latin typeface="Heiti SC Light" charset="-122"/>
-                <a:ea typeface="Heiti SC Light" charset="-122"/>
-                <a:cs typeface="Heiti SC Light" charset="-122"/>
-              </a:rPr>
-              <a:t>pySci·</a:t>
+              <a:t>·pySci·</a:t>
             </a:r>
             <a:endParaRPr kumimoji="1" lang="zh-CN" altLang="en-US" sz="2000" spc="300" dirty="0">
               <a:latin typeface="Heiti SC Light" charset="-122"/>
@@ -7007,18 +7012,30 @@
         </p:nvSpPr>
         <p:spPr>
           <a:xfrm>
-            <a:off x="548640" y="365760"/>
-          </a:xfrm>
-        </p:spPr>
-        <p:txBody>
-          <a:bodyPr/>
+            <a:off x="549275" y="401320"/>
+            <a:ext cx="5500000" cy="398780"/>
+          </a:xfrm>
+          <a:prstGeom prst="rect">
+            <a:avLst/>
+          </a:prstGeom>
+          <a:noFill/>
+          <a:ln>
+            <a:solidFill>
+              <a:schemeClr val="tx1"/>
+            </a:solidFill>
+          </a:ln>
+        </p:spPr>
+        <p:txBody>
+          <a:bodyPr wrap="square" rtlCol="0">
+            <a:spAutoFit/>
+          </a:bodyPr>
           <a:lstStyle/>
           <a:p>
             <a:r>
-              <a:rPr>
-                <a:latin typeface="等线 Light"/>
-                <a:ea typeface="等线 Light"/>
-                <a:cs typeface="等线 Light"/>
+              <a:rPr sz="2000" spc="300">
+                <a:latin typeface="Heiti SC Light" charset="-122"/>
+                <a:ea typeface="Heiti SC Light" charset="-122"/>
+                <a:cs typeface="Heiti SC Light" charset="-122"/>
               </a:rPr>
               <a:t>pySci 与 Agent Loop</a:t>
             </a:r>
@@ -7140,6 +7157,278 @@
           </a:prstGeom>
         </p:spPr>
       </p:pic>
+    </p:spTree>
+  </p:cSld>
+  <p:clrMapOvr>
+    <a:masterClrMapping/>
+  </p:clrMapOvr>
+</p:sld>
+</file>
+
+<file path=ppt/slides/slide8.xml><?xml version="1.0" encoding="utf-8"?>
+<p:sld xmlns:a="http://schemas.openxmlformats.org/drawingml/2006/main" xmlns:p="http://schemas.openxmlformats.org/presentationml/2006/main" xmlns:r="http://schemas.openxmlformats.org/officeDocument/2006/relationships">
+  <p:cSld>
+    <p:spTree>
+      <p:nvGrpSpPr>
+        <p:cNvPr id="1" name=""/>
+        <p:cNvGrpSpPr/>
+        <p:nvPr/>
+      </p:nvGrpSpPr>
+      <p:grpSpPr/>
+      <p:sp>
+        <p:nvSpPr>
+          <p:cNvPr id="8" name="文本框 7"/>
+          <p:cNvSpPr txBox="1"/>
+          <p:nvPr/>
+        </p:nvSpPr>
+        <p:spPr>
+          <a:xfrm>
+            <a:off x="4863547" y="2672433"/>
+            <a:ext cx="2464905" cy="598796"/>
+          </a:xfrm>
+          <a:prstGeom prst="rect">
+            <a:avLst/>
+          </a:prstGeom>
+          <a:noFill/>
+        </p:spPr>
+        <p:txBody>
+          <a:bodyPr wrap="square" rtlCol="0">
+            <a:spAutoFit/>
+          </a:bodyPr>
+          <a:lstStyle/>
+          <a:p>
+            <a:pPr algn="dist"/>
+            <a:r>
+              <a:rPr kumimoji="1" lang="en-US" altLang="zh-CN" sz="3200" dirty="0" smtClean="0">
+                <a:latin typeface="Heiti SC Light" charset="-122"/>
+                <a:ea typeface="Heiti SC Light" charset="-122"/>
+                <a:cs typeface="Heiti SC Light" charset="-122"/>
+              </a:rPr>
+              <a:t>THANKS</a:t>
+            </a:r>
+            <a:endParaRPr kumimoji="1" lang="zh-CN" altLang="en-US" sz="3200" dirty="0">
+              <a:latin typeface="Heiti SC Light" charset="-122"/>
+              <a:ea typeface="Heiti SC Light" charset="-122"/>
+              <a:cs typeface="Heiti SC Light" charset="-122"/>
+            </a:endParaRPr>
+          </a:p>
+        </p:txBody>
+      </p:sp>
+      <p:sp>
+        <p:nvSpPr>
+          <p:cNvPr id="9" name="文本框 8"/>
+          <p:cNvSpPr txBox="1"/>
+          <p:nvPr/>
+        </p:nvSpPr>
+        <p:spPr>
+          <a:xfrm>
+            <a:off x="3345296" y="3712253"/>
+            <a:ext cx="5289371" cy="229615"/>
+          </a:xfrm>
+          <a:prstGeom prst="rect">
+            <a:avLst/>
+          </a:prstGeom>
+          <a:noFill/>
+        </p:spPr>
+        <p:txBody>
+          <a:bodyPr wrap="square" rtlCol="0">
+            <a:spAutoFit/>
+          </a:bodyPr>
+          <a:lstStyle>
+            <a:defPPr>
+              <a:defRPr lang="zh-CN"/>
+            </a:defPPr>
+            <a:lvl1pPr marL="0" algn="l" defTabSz="914400" rtl="0" eaLnBrk="1" latinLnBrk="0" hangingPunct="1">
+              <a:defRPr sz="1800" kern="1200">
+                <a:solidFill>
+                  <a:schemeClr val="tx1"/>
+                </a:solidFill>
+                <a:latin typeface="+mn-lt"/>
+                <a:ea typeface="+mn-ea"/>
+                <a:cs typeface="+mn-cs"/>
+              </a:defRPr>
+            </a:lvl1pPr>
+            <a:lvl2pPr marL="457200" algn="l" defTabSz="914400" rtl="0" eaLnBrk="1" latinLnBrk="0" hangingPunct="1">
+              <a:defRPr sz="1800" kern="1200">
+                <a:solidFill>
+                  <a:schemeClr val="tx1"/>
+                </a:solidFill>
+                <a:latin typeface="+mn-lt"/>
+                <a:ea typeface="+mn-ea"/>
+                <a:cs typeface="+mn-cs"/>
+              </a:defRPr>
+            </a:lvl2pPr>
+            <a:lvl3pPr marL="914400" algn="l" defTabSz="914400" rtl="0" eaLnBrk="1" latinLnBrk="0" hangingPunct="1">
+              <a:defRPr sz="1800" kern="1200">
+                <a:solidFill>
+                  <a:schemeClr val="tx1"/>
+                </a:solidFill>
+                <a:latin typeface="+mn-lt"/>
+                <a:ea typeface="+mn-ea"/>
+                <a:cs typeface="+mn-cs"/>
+              </a:defRPr>
+            </a:lvl3pPr>
+            <a:lvl4pPr marL="1371600" algn="l" defTabSz="914400" rtl="0" eaLnBrk="1" latinLnBrk="0" hangingPunct="1">
+              <a:defRPr sz="1800" kern="1200">
+                <a:solidFill>
+                  <a:schemeClr val="tx1"/>
+                </a:solidFill>
+                <a:latin typeface="+mn-lt"/>
+                <a:ea typeface="+mn-ea"/>
+                <a:cs typeface="+mn-cs"/>
+              </a:defRPr>
+            </a:lvl4pPr>
+            <a:lvl5pPr marL="1828800" algn="l" defTabSz="914400" rtl="0" eaLnBrk="1" latinLnBrk="0" hangingPunct="1">
+              <a:defRPr sz="1800" kern="1200">
+                <a:solidFill>
+                  <a:schemeClr val="tx1"/>
+                </a:solidFill>
+                <a:latin typeface="+mn-lt"/>
+                <a:ea typeface="+mn-ea"/>
+                <a:cs typeface="+mn-cs"/>
+              </a:defRPr>
+            </a:lvl5pPr>
+            <a:lvl6pPr marL="2286000" algn="l" defTabSz="914400" rtl="0" eaLnBrk="1" latinLnBrk="0" hangingPunct="1">
+              <a:defRPr sz="1800" kern="1200">
+                <a:solidFill>
+                  <a:schemeClr val="tx1"/>
+                </a:solidFill>
+                <a:latin typeface="+mn-lt"/>
+                <a:ea typeface="+mn-ea"/>
+                <a:cs typeface="+mn-cs"/>
+              </a:defRPr>
+            </a:lvl6pPr>
+            <a:lvl7pPr marL="2743200" algn="l" defTabSz="914400" rtl="0" eaLnBrk="1" latinLnBrk="0" hangingPunct="1">
+              <a:defRPr sz="1800" kern="1200">
+                <a:solidFill>
+                  <a:schemeClr val="tx1"/>
+                </a:solidFill>
+                <a:latin typeface="+mn-lt"/>
+                <a:ea typeface="+mn-ea"/>
+                <a:cs typeface="+mn-cs"/>
+              </a:defRPr>
+            </a:lvl7pPr>
+            <a:lvl8pPr marL="3200400" algn="l" defTabSz="914400" rtl="0" eaLnBrk="1" latinLnBrk="0" hangingPunct="1">
+              <a:defRPr sz="1800" kern="1200">
+                <a:solidFill>
+                  <a:schemeClr val="tx1"/>
+                </a:solidFill>
+                <a:latin typeface="+mn-lt"/>
+                <a:ea typeface="+mn-ea"/>
+                <a:cs typeface="+mn-cs"/>
+              </a:defRPr>
+            </a:lvl8pPr>
+            <a:lvl9pPr marL="3657600" algn="l" defTabSz="914400" rtl="0" eaLnBrk="1" latinLnBrk="0" hangingPunct="1">
+              <a:defRPr sz="1800" kern="1200">
+                <a:solidFill>
+                  <a:schemeClr val="tx1"/>
+                </a:solidFill>
+                <a:latin typeface="+mn-lt"/>
+                <a:ea typeface="+mn-ea"/>
+                <a:cs typeface="+mn-cs"/>
+              </a:defRPr>
+            </a:lvl9pPr>
+          </a:lstStyle>
+          <a:p>
+            <a:pPr algn="dist">
+              <a:lnSpc>
+                <a:spcPct val="130000"/>
+              </a:lnSpc>
+            </a:pPr>
+            <a:r>
+              <a:rPr lang="en-US" altLang="zh-CN" sz="800" dirty="0" smtClean="0">
+                <a:solidFill>
+                  <a:schemeClr val="tx1">
+                    <a:lumMod val="65000"/>
+                    <a:lumOff val="35000"/>
+                  </a:schemeClr>
+                </a:solidFill>
+                <a:latin typeface="Heiti SC Light" charset="-122"/>
+                <a:ea typeface="Heiti SC Light" charset="-122"/>
+                <a:cs typeface="Heiti SC Light" charset="-122"/>
+              </a:rPr>
+              <a:t>BUSSINESS</a:t>
+            </a:r>
+            <a:r>
+              <a:rPr lang="zh-CN" altLang="en-US" sz="800" dirty="0" smtClean="0">
+                <a:solidFill>
+                  <a:schemeClr val="tx1">
+                    <a:lumMod val="65000"/>
+                    <a:lumOff val="35000"/>
+                  </a:schemeClr>
+                </a:solidFill>
+                <a:latin typeface="Heiti SC Light" charset="-122"/>
+                <a:ea typeface="Heiti SC Light" charset="-122"/>
+                <a:cs typeface="Heiti SC Light" charset="-122"/>
+              </a:rPr>
+              <a:t> </a:t>
+            </a:r>
+            <a:r>
+              <a:rPr lang="en-US" altLang="zh-CN" sz="800" dirty="0" smtClean="0">
+                <a:solidFill>
+                  <a:schemeClr val="tx1">
+                    <a:lumMod val="65000"/>
+                    <a:lumOff val="35000"/>
+                  </a:schemeClr>
+                </a:solidFill>
+                <a:latin typeface="Heiti SC Light" charset="-122"/>
+                <a:ea typeface="Heiti SC Light" charset="-122"/>
+                <a:cs typeface="Heiti SC Light" charset="-122"/>
+              </a:rPr>
+              <a:t>POWERPOINT</a:t>
+            </a:r>
+            <a:endParaRPr lang="en-US" altLang="zh-CN" sz="800" dirty="0">
+              <a:solidFill>
+                <a:schemeClr val="tx1">
+                  <a:lumMod val="65000"/>
+                  <a:lumOff val="35000"/>
+                </a:schemeClr>
+              </a:solidFill>
+              <a:latin typeface="Heiti SC Light" charset="-122"/>
+              <a:ea typeface="Heiti SC Light" charset="-122"/>
+              <a:cs typeface="Heiti SC Light" charset="-122"/>
+            </a:endParaRPr>
+          </a:p>
+        </p:txBody>
+      </p:sp>
+      <p:cxnSp>
+        <p:nvCxnSpPr>
+          <p:cNvPr id="3" name="直线连接符 2"/>
+          <p:cNvCxnSpPr/>
+          <p:nvPr/>
+        </p:nvCxnSpPr>
+        <p:spPr>
+          <a:xfrm>
+            <a:off x="3256609" y="3429000"/>
+            <a:ext cx="5678783" cy="0"/>
+          </a:xfrm>
+          <a:prstGeom prst="line">
+            <a:avLst/>
+          </a:prstGeom>
+          <a:ln>
+            <a:solidFill>
+              <a:schemeClr val="tx1">
+                <a:lumMod val="50000"/>
+                <a:lumOff val="50000"/>
+              </a:schemeClr>
+            </a:solidFill>
+          </a:ln>
+        </p:spPr>
+        <p:style>
+          <a:lnRef idx="1">
+            <a:schemeClr val="accent1"/>
+          </a:lnRef>
+          <a:fillRef idx="0">
+            <a:schemeClr val="accent1"/>
+          </a:fillRef>
+          <a:effectRef idx="0">
+            <a:schemeClr val="accent1"/>
+          </a:effectRef>
+          <a:fontRef idx="minor">
+            <a:schemeClr val="tx1"/>
+          </a:fontRef>
+        </p:style>
+      </p:cxnSp>
     </p:spTree>
   </p:cSld>
   <p:clrMapOvr>

--- a/data/research/1_gain_ep/汇报PPT/20261016/20261016.pptx
+++ b/data/research/1_gain_ep/汇报PPT/20261016/20261016.pptx
@@ -3509,7 +3509,7 @@
         <p:spPr>
           <a:xfrm>
             <a:off x="549275" y="401320"/>
-            <a:ext cx="5500000" cy="398780"/>
+            <a:ext cx="2040000" cy="398780"/>
           </a:xfrm>
           <a:prstGeom prst="rect">
             <a:avLst/>
@@ -3528,12 +3528,12 @@
           <a:lstStyle/>
           <a:p>
             <a:r>
-              <a:rPr sz="2000" spc="300">
+              <a:rPr sz="2000" spc="150">
                 <a:latin typeface="Heiti SC Light" charset="-122"/>
                 <a:ea typeface="Heiti SC Light" charset="-122"/>
                 <a:cs typeface="Heiti SC Light" charset="-122"/>
               </a:rPr>
-              <a:t>AI COMSOL</a:t>
+              <a:t>·AI COMSOL·</a:t>
             </a:r>
           </a:p>
         </p:txBody>
@@ -3609,6 +3609,11 @@
           <a:prstGeom prst="rect">
             <a:avLst/>
           </a:prstGeom>
+          <a:ln w="9525">
+            <a:solidFill>
+              <a:srgbClr val="000000"/>
+            </a:solidFill>
+          </a:ln>
         </p:spPr>
       </p:pic>
       <p:sp>
@@ -3670,6 +3675,11 @@
           <a:prstGeom prst="rect">
             <a:avLst/>
           </a:prstGeom>
+          <a:ln w="9525">
+            <a:solidFill>
+              <a:srgbClr val="000000"/>
+            </a:solidFill>
+          </a:ln>
         </p:spPr>
       </p:pic>
       <p:sp>
@@ -3731,6 +3741,11 @@
           <a:prstGeom prst="rect">
             <a:avLst/>
           </a:prstGeom>
+          <a:ln w="9525">
+            <a:solidFill>
+              <a:srgbClr val="000000"/>
+            </a:solidFill>
+          </a:ln>
         </p:spPr>
       </p:pic>
       <p:pic>
@@ -3755,6 +3770,11 @@
           <a:prstGeom prst="rect">
             <a:avLst/>
           </a:prstGeom>
+          <a:ln w="9525">
+            <a:solidFill>
+              <a:srgbClr val="000000"/>
+            </a:solidFill>
+          </a:ln>
         </p:spPr>
       </p:pic>
       <p:sp>
@@ -3870,7 +3890,7 @@
         <p:spPr>
           <a:xfrm>
             <a:off x="549275" y="401320"/>
-            <a:ext cx="5500000" cy="398780"/>
+            <a:ext cx="1273810" cy="398780"/>
           </a:xfrm>
           <a:prstGeom prst="rect">
             <a:avLst/>
@@ -7013,7 +7033,7 @@
         <p:spPr>
           <a:xfrm>
             <a:off x="549275" y="401320"/>
-            <a:ext cx="5500000" cy="398780"/>
+            <a:ext cx="3304540" cy="398780"/>
           </a:xfrm>
           <a:prstGeom prst="rect">
             <a:avLst/>
@@ -7032,12 +7052,12 @@
           <a:lstStyle/>
           <a:p>
             <a:r>
-              <a:rPr sz="2000" spc="300">
+              <a:rPr sz="2000" spc="150">
                 <a:latin typeface="Heiti SC Light" charset="-122"/>
                 <a:ea typeface="Heiti SC Light" charset="-122"/>
                 <a:cs typeface="Heiti SC Light" charset="-122"/>
               </a:rPr>
-              <a:t>pySci 与 Agent Loop</a:t>
+              <a:t>·pySci 与 Agent Loop·</a:t>
             </a:r>
           </a:p>
         </p:txBody>
@@ -7113,6 +7133,11 @@
           <a:prstGeom prst="rect">
             <a:avLst/>
           </a:prstGeom>
+          <a:ln w="9525">
+            <a:solidFill>
+              <a:srgbClr val="000000"/>
+            </a:solidFill>
+          </a:ln>
         </p:spPr>
       </p:pic>
     </p:spTree>
